--- a/docs/ページ遷移図.pptx
+++ b/docs/ページ遷移図.pptx
@@ -118,6 +118,329 @@
 </p:presentation>
 </file>
 
+<file path=ppt/revisionInfo.xml><?xml version="1.0" encoding="utf-8"?>
+<p1510:revInfo xmlns:a="http://schemas.openxmlformats.org/drawingml/2006/main" xmlns:r="http://schemas.openxmlformats.org/officeDocument/2006/relationships" xmlns:p1510="http://schemas.microsoft.com/office/powerpoint/2015/10/main">
+  <p1510:revLst>
+    <p1510:client id="{5594F931-3AFD-4E8C-9307-AE85D7268855}" v="3" dt="2026-04-22T02:58:57.957"/>
+  </p1510:revLst>
+</p1510:revInfo>
+</file>
+
+<file path=ppt/changesInfos/changesInfo1.xml><?xml version="1.0" encoding="utf-8"?>
+<pc:chgInfo xmlns:a="http://schemas.openxmlformats.org/drawingml/2006/main" xmlns:r="http://schemas.openxmlformats.org/officeDocument/2006/relationships" xmlns:ac="http://schemas.microsoft.com/office/drawing/2013/main/command" xmlns:pc="http://schemas.microsoft.com/office/powerpoint/2013/main/command">
+  <pc:docChgLst>
+    <pc:chgData name="CTA24 乙成 隼士" userId="61cf1e87-e946-4c54-a84e-b17cc486914d" providerId="ADAL" clId="{490A5E6A-DE08-485E-98A5-335649A1BFE8}"/>
+    <pc:docChg chg="undo redo custSel modSld">
+      <pc:chgData name="CTA24 乙成 隼士" userId="61cf1e87-e946-4c54-a84e-b17cc486914d" providerId="ADAL" clId="{490A5E6A-DE08-485E-98A5-335649A1BFE8}" dt="2026-04-22T03:39:27.972" v="404" actId="20577"/>
+      <pc:docMkLst>
+        <pc:docMk/>
+      </pc:docMkLst>
+      <pc:sldChg chg="delSp modSp mod">
+        <pc:chgData name="CTA24 乙成 隼士" userId="61cf1e87-e946-4c54-a84e-b17cc486914d" providerId="ADAL" clId="{490A5E6A-DE08-485E-98A5-335649A1BFE8}" dt="2026-04-22T03:20:48.148" v="350" actId="20577"/>
+        <pc:sldMkLst>
+          <pc:docMk/>
+          <pc:sldMk cId="3229039554" sldId="256"/>
+        </pc:sldMkLst>
+        <pc:spChg chg="mod">
+          <ac:chgData name="CTA24 乙成 隼士" userId="61cf1e87-e946-4c54-a84e-b17cc486914d" providerId="ADAL" clId="{490A5E6A-DE08-485E-98A5-335649A1BFE8}" dt="2026-04-22T02:59:54.367" v="29" actId="13822"/>
+          <ac:spMkLst>
+            <pc:docMk/>
+            <pc:sldMk cId="3229039554" sldId="256"/>
+            <ac:spMk id="13" creationId="{C025D16C-2F83-5B82-1029-796A2AAA5B83}"/>
+          </ac:spMkLst>
+        </pc:spChg>
+        <pc:spChg chg="mod">
+          <ac:chgData name="CTA24 乙成 隼士" userId="61cf1e87-e946-4c54-a84e-b17cc486914d" providerId="ADAL" clId="{490A5E6A-DE08-485E-98A5-335649A1BFE8}" dt="2026-04-22T03:20:48.148" v="350" actId="20577"/>
+          <ac:spMkLst>
+            <pc:docMk/>
+            <pc:sldMk cId="3229039554" sldId="256"/>
+            <ac:spMk id="17" creationId="{F2E883E1-120F-3802-0FD4-B95F4DDA42F9}"/>
+          </ac:spMkLst>
+        </pc:spChg>
+        <pc:spChg chg="mod">
+          <ac:chgData name="CTA24 乙成 隼士" userId="61cf1e87-e946-4c54-a84e-b17cc486914d" providerId="ADAL" clId="{490A5E6A-DE08-485E-98A5-335649A1BFE8}" dt="2026-04-22T02:59:48.872" v="28" actId="13822"/>
+          <ac:spMkLst>
+            <pc:docMk/>
+            <pc:sldMk cId="3229039554" sldId="256"/>
+            <ac:spMk id="41" creationId="{C51A865C-657D-2A1B-7B48-55241979DC20}"/>
+          </ac:spMkLst>
+        </pc:spChg>
+        <pc:spChg chg="mod">
+          <ac:chgData name="CTA24 乙成 隼士" userId="61cf1e87-e946-4c54-a84e-b17cc486914d" providerId="ADAL" clId="{490A5E6A-DE08-485E-98A5-335649A1BFE8}" dt="2026-04-22T03:00:29.044" v="97" actId="20577"/>
+          <ac:spMkLst>
+            <pc:docMk/>
+            <pc:sldMk cId="3229039554" sldId="256"/>
+            <ac:spMk id="42" creationId="{99451217-01BE-7C42-976B-0CABC926E244}"/>
+          </ac:spMkLst>
+        </pc:spChg>
+        <pc:grpChg chg="del mod">
+          <ac:chgData name="CTA24 乙成 隼士" userId="61cf1e87-e946-4c54-a84e-b17cc486914d" providerId="ADAL" clId="{490A5E6A-DE08-485E-98A5-335649A1BFE8}" dt="2026-04-22T03:00:25.178" v="95" actId="478"/>
+          <ac:grpSpMkLst>
+            <pc:docMk/>
+            <pc:sldMk cId="3229039554" sldId="256"/>
+            <ac:grpSpMk id="12" creationId="{3A05A791-C433-B48B-A3D7-CC58106B1C19}"/>
+          </ac:grpSpMkLst>
+        </pc:grpChg>
+      </pc:sldChg>
+      <pc:sldChg chg="addSp delSp modSp mod">
+        <pc:chgData name="CTA24 乙成 隼士" userId="61cf1e87-e946-4c54-a84e-b17cc486914d" providerId="ADAL" clId="{490A5E6A-DE08-485E-98A5-335649A1BFE8}" dt="2026-04-22T03:39:27.972" v="404" actId="20577"/>
+        <pc:sldMkLst>
+          <pc:docMk/>
+          <pc:sldMk cId="691347699" sldId="258"/>
+        </pc:sldMkLst>
+        <pc:spChg chg="mod">
+          <ac:chgData name="CTA24 乙成 隼士" userId="61cf1e87-e946-4c54-a84e-b17cc486914d" providerId="ADAL" clId="{490A5E6A-DE08-485E-98A5-335649A1BFE8}" dt="2026-04-22T03:04:15.950" v="261" actId="1076"/>
+          <ac:spMkLst>
+            <pc:docMk/>
+            <pc:sldMk cId="691347699" sldId="258"/>
+            <ac:spMk id="3" creationId="{9255EBFF-13EB-88D1-0512-61BC59880670}"/>
+          </ac:spMkLst>
+        </pc:spChg>
+        <pc:spChg chg="mod">
+          <ac:chgData name="CTA24 乙成 隼士" userId="61cf1e87-e946-4c54-a84e-b17cc486914d" providerId="ADAL" clId="{490A5E6A-DE08-485E-98A5-335649A1BFE8}" dt="2026-04-22T03:39:27.972" v="404" actId="20577"/>
+          <ac:spMkLst>
+            <pc:docMk/>
+            <pc:sldMk cId="691347699" sldId="258"/>
+            <ac:spMk id="4" creationId="{C8702786-8C62-AD2E-0031-258C386AC7CE}"/>
+          </ac:spMkLst>
+        </pc:spChg>
+        <pc:spChg chg="mod">
+          <ac:chgData name="CTA24 乙成 隼士" userId="61cf1e87-e946-4c54-a84e-b17cc486914d" providerId="ADAL" clId="{490A5E6A-DE08-485E-98A5-335649A1BFE8}" dt="2026-04-22T03:31:25.895" v="390" actId="20577"/>
+          <ac:spMkLst>
+            <pc:docMk/>
+            <pc:sldMk cId="691347699" sldId="258"/>
+            <ac:spMk id="9" creationId="{B7DEE1A4-699E-2B41-99DB-373A0EE3AEEE}"/>
+          </ac:spMkLst>
+        </pc:spChg>
+        <pc:spChg chg="del mod topLvl">
+          <ac:chgData name="CTA24 乙成 隼士" userId="61cf1e87-e946-4c54-a84e-b17cc486914d" providerId="ADAL" clId="{490A5E6A-DE08-485E-98A5-335649A1BFE8}" dt="2026-04-22T02:57:30.236" v="10" actId="21"/>
+          <ac:spMkLst>
+            <pc:docMk/>
+            <pc:sldMk cId="691347699" sldId="258"/>
+            <ac:spMk id="12" creationId="{34151340-92C4-AEF6-D090-52104F552D32}"/>
+          </ac:spMkLst>
+        </pc:spChg>
+        <pc:spChg chg="mod topLvl">
+          <ac:chgData name="CTA24 乙成 隼士" userId="61cf1e87-e946-4c54-a84e-b17cc486914d" providerId="ADAL" clId="{490A5E6A-DE08-485E-98A5-335649A1BFE8}" dt="2026-04-22T03:11:09.374" v="315" actId="14100"/>
+          <ac:spMkLst>
+            <pc:docMk/>
+            <pc:sldMk cId="691347699" sldId="258"/>
+            <ac:spMk id="13" creationId="{06873856-9E74-4B1C-29AF-E25B49BDBE9C}"/>
+          </ac:spMkLst>
+        </pc:spChg>
+        <pc:spChg chg="add mod">
+          <ac:chgData name="CTA24 乙成 隼士" userId="61cf1e87-e946-4c54-a84e-b17cc486914d" providerId="ADAL" clId="{490A5E6A-DE08-485E-98A5-335649A1BFE8}" dt="2026-04-22T03:11:09.374" v="315" actId="14100"/>
+          <ac:spMkLst>
+            <pc:docMk/>
+            <pc:sldMk cId="691347699" sldId="258"/>
+            <ac:spMk id="14" creationId="{34151340-92C4-AEF6-D090-52104F552D32}"/>
+          </ac:spMkLst>
+        </pc:spChg>
+        <pc:spChg chg="mod">
+          <ac:chgData name="CTA24 乙成 隼士" userId="61cf1e87-e946-4c54-a84e-b17cc486914d" providerId="ADAL" clId="{490A5E6A-DE08-485E-98A5-335649A1BFE8}" dt="2026-04-22T03:12:04.038" v="324" actId="113"/>
+          <ac:spMkLst>
+            <pc:docMk/>
+            <pc:sldMk cId="691347699" sldId="258"/>
+            <ac:spMk id="21" creationId="{456D6FAE-4A9A-C746-587D-A570A82E208F}"/>
+          </ac:spMkLst>
+        </pc:spChg>
+        <pc:spChg chg="mod">
+          <ac:chgData name="CTA24 乙成 隼士" userId="61cf1e87-e946-4c54-a84e-b17cc486914d" providerId="ADAL" clId="{490A5E6A-DE08-485E-98A5-335649A1BFE8}" dt="2026-04-22T03:02:46.116" v="161" actId="20577"/>
+          <ac:spMkLst>
+            <pc:docMk/>
+            <pc:sldMk cId="691347699" sldId="258"/>
+            <ac:spMk id="27" creationId="{5BF3F1E0-4297-B0F5-CD58-D0627BBB6EE9}"/>
+          </ac:spMkLst>
+        </pc:spChg>
+        <pc:spChg chg="mod">
+          <ac:chgData name="CTA24 乙成 隼士" userId="61cf1e87-e946-4c54-a84e-b17cc486914d" providerId="ADAL" clId="{490A5E6A-DE08-485E-98A5-335649A1BFE8}" dt="2026-04-22T03:04:09.726" v="259" actId="20577"/>
+          <ac:spMkLst>
+            <pc:docMk/>
+            <pc:sldMk cId="691347699" sldId="258"/>
+            <ac:spMk id="28" creationId="{706F3448-C0E0-CFFF-3C78-EA7735D85D03}"/>
+          </ac:spMkLst>
+        </pc:spChg>
+        <pc:spChg chg="mod">
+          <ac:chgData name="CTA24 乙成 隼士" userId="61cf1e87-e946-4c54-a84e-b17cc486914d" providerId="ADAL" clId="{490A5E6A-DE08-485E-98A5-335649A1BFE8}" dt="2026-04-22T03:11:09.374" v="315" actId="14100"/>
+          <ac:spMkLst>
+            <pc:docMk/>
+            <pc:sldMk cId="691347699" sldId="258"/>
+            <ac:spMk id="31" creationId="{038929DC-3AEC-6F6E-6EF0-4BADB7727282}"/>
+          </ac:spMkLst>
+        </pc:spChg>
+        <pc:spChg chg="mod">
+          <ac:chgData name="CTA24 乙成 隼士" userId="61cf1e87-e946-4c54-a84e-b17cc486914d" providerId="ADAL" clId="{490A5E6A-DE08-485E-98A5-335649A1BFE8}" dt="2026-04-22T03:11:09.374" v="315" actId="14100"/>
+          <ac:spMkLst>
+            <pc:docMk/>
+            <pc:sldMk cId="691347699" sldId="258"/>
+            <ac:spMk id="33" creationId="{ADD9447D-7110-3B55-3CF1-97A96D89287A}"/>
+          </ac:spMkLst>
+        </pc:spChg>
+        <pc:grpChg chg="mod">
+          <ac:chgData name="CTA24 乙成 隼士" userId="61cf1e87-e946-4c54-a84e-b17cc486914d" providerId="ADAL" clId="{490A5E6A-DE08-485E-98A5-335649A1BFE8}" dt="2026-04-22T03:11:09.374" v="315" actId="14100"/>
+          <ac:grpSpMkLst>
+            <pc:docMk/>
+            <pc:sldMk cId="691347699" sldId="258"/>
+            <ac:grpSpMk id="2" creationId="{54AB7C62-DC70-0B0E-B600-E66FBABC78E6}"/>
+          </ac:grpSpMkLst>
+        </pc:grpChg>
+        <pc:grpChg chg="mod">
+          <ac:chgData name="CTA24 乙成 隼士" userId="61cf1e87-e946-4c54-a84e-b17cc486914d" providerId="ADAL" clId="{490A5E6A-DE08-485E-98A5-335649A1BFE8}" dt="2026-04-22T03:11:09.374" v="315" actId="14100"/>
+          <ac:grpSpMkLst>
+            <pc:docMk/>
+            <pc:sldMk cId="691347699" sldId="258"/>
+            <ac:grpSpMk id="7" creationId="{34A7B0D8-9EC3-B75D-8579-52CA1391D9FB}"/>
+          </ac:grpSpMkLst>
+        </pc:grpChg>
+        <pc:grpChg chg="add del mod">
+          <ac:chgData name="CTA24 乙成 隼士" userId="61cf1e87-e946-4c54-a84e-b17cc486914d" providerId="ADAL" clId="{490A5E6A-DE08-485E-98A5-335649A1BFE8}" dt="2026-04-22T02:57:30.236" v="10" actId="21"/>
+          <ac:grpSpMkLst>
+            <pc:docMk/>
+            <pc:sldMk cId="691347699" sldId="258"/>
+            <ac:grpSpMk id="11" creationId="{469F925C-F28B-A7BF-1512-2E035B72CC6F}"/>
+          </ac:grpSpMkLst>
+        </pc:grpChg>
+        <pc:grpChg chg="mod">
+          <ac:chgData name="CTA24 乙成 隼士" userId="61cf1e87-e946-4c54-a84e-b17cc486914d" providerId="ADAL" clId="{490A5E6A-DE08-485E-98A5-335649A1BFE8}" dt="2026-04-22T03:11:26.999" v="322" actId="1076"/>
+          <ac:grpSpMkLst>
+            <pc:docMk/>
+            <pc:sldMk cId="691347699" sldId="258"/>
+            <ac:grpSpMk id="19" creationId="{E4082328-3D29-126F-BD1F-2651D58B527E}"/>
+          </ac:grpSpMkLst>
+        </pc:grpChg>
+        <pc:grpChg chg="mod">
+          <ac:chgData name="CTA24 乙成 隼士" userId="61cf1e87-e946-4c54-a84e-b17cc486914d" providerId="ADAL" clId="{490A5E6A-DE08-485E-98A5-335649A1BFE8}" dt="2026-04-22T03:11:09.374" v="315" actId="14100"/>
+          <ac:grpSpMkLst>
+            <pc:docMk/>
+            <pc:sldMk cId="691347699" sldId="258"/>
+            <ac:grpSpMk id="26" creationId="{3648C4BB-94A7-011B-541C-EB7DA1A3012E}"/>
+          </ac:grpSpMkLst>
+        </pc:grpChg>
+        <pc:grpChg chg="mod">
+          <ac:chgData name="CTA24 乙成 隼士" userId="61cf1e87-e946-4c54-a84e-b17cc486914d" providerId="ADAL" clId="{490A5E6A-DE08-485E-98A5-335649A1BFE8}" dt="2026-04-22T03:11:09.374" v="315" actId="14100"/>
+          <ac:grpSpMkLst>
+            <pc:docMk/>
+            <pc:sldMk cId="691347699" sldId="258"/>
+            <ac:grpSpMk id="34" creationId="{296B5D3E-4926-05EB-7398-427F43797AA5}"/>
+          </ac:grpSpMkLst>
+        </pc:grpChg>
+        <pc:grpChg chg="mod">
+          <ac:chgData name="CTA24 乙成 隼士" userId="61cf1e87-e946-4c54-a84e-b17cc486914d" providerId="ADAL" clId="{490A5E6A-DE08-485E-98A5-335649A1BFE8}" dt="2026-04-22T03:11:09.374" v="315" actId="14100"/>
+          <ac:grpSpMkLst>
+            <pc:docMk/>
+            <pc:sldMk cId="691347699" sldId="258"/>
+            <ac:grpSpMk id="47" creationId="{693A90C2-667D-EF69-7DD5-48FF4A1A47B3}"/>
+          </ac:grpSpMkLst>
+        </pc:grpChg>
+        <pc:cxnChg chg="add mod">
+          <ac:chgData name="CTA24 乙成 隼士" userId="61cf1e87-e946-4c54-a84e-b17cc486914d" providerId="ADAL" clId="{490A5E6A-DE08-485E-98A5-335649A1BFE8}" dt="2026-04-22T02:58:49.815" v="22" actId="14100"/>
+          <ac:cxnSpMkLst>
+            <pc:docMk/>
+            <pc:sldMk cId="691347699" sldId="258"/>
+            <ac:cxnSpMk id="16" creationId="{B986DC69-D27E-D8A6-30B3-C7C58CAA681B}"/>
+          </ac:cxnSpMkLst>
+        </pc:cxnChg>
+        <pc:cxnChg chg="mod">
+          <ac:chgData name="CTA24 乙成 隼士" userId="61cf1e87-e946-4c54-a84e-b17cc486914d" providerId="ADAL" clId="{490A5E6A-DE08-485E-98A5-335649A1BFE8}" dt="2026-04-22T03:11:26.999" v="322" actId="1076"/>
+          <ac:cxnSpMkLst>
+            <pc:docMk/>
+            <pc:sldMk cId="691347699" sldId="258"/>
+            <ac:cxnSpMk id="17" creationId="{375BE775-8A21-60C8-36DF-1AD7BF0C3D2E}"/>
+          </ac:cxnSpMkLst>
+        </pc:cxnChg>
+        <pc:cxnChg chg="mod">
+          <ac:chgData name="CTA24 乙成 隼士" userId="61cf1e87-e946-4c54-a84e-b17cc486914d" providerId="ADAL" clId="{490A5E6A-DE08-485E-98A5-335649A1BFE8}" dt="2026-04-22T03:11:26.999" v="322" actId="1076"/>
+          <ac:cxnSpMkLst>
+            <pc:docMk/>
+            <pc:sldMk cId="691347699" sldId="258"/>
+            <ac:cxnSpMk id="24" creationId="{9FBC942A-B4EB-6371-4A09-AFDBA577F8C2}"/>
+          </ac:cxnSpMkLst>
+        </pc:cxnChg>
+        <pc:cxnChg chg="mod">
+          <ac:chgData name="CTA24 乙成 隼士" userId="61cf1e87-e946-4c54-a84e-b17cc486914d" providerId="ADAL" clId="{490A5E6A-DE08-485E-98A5-335649A1BFE8}" dt="2026-04-22T03:09:43.011" v="306" actId="1076"/>
+          <ac:cxnSpMkLst>
+            <pc:docMk/>
+            <pc:sldMk cId="691347699" sldId="258"/>
+            <ac:cxnSpMk id="29" creationId="{BA9576D3-ECF3-5120-365F-60057D924088}"/>
+          </ac:cxnSpMkLst>
+        </pc:cxnChg>
+        <pc:cxnChg chg="add del mod">
+          <ac:chgData name="CTA24 乙成 隼士" userId="61cf1e87-e946-4c54-a84e-b17cc486914d" providerId="ADAL" clId="{490A5E6A-DE08-485E-98A5-335649A1BFE8}" dt="2026-04-22T03:09:51.283" v="313" actId="11529"/>
+          <ac:cxnSpMkLst>
+            <pc:docMk/>
+            <pc:sldMk cId="691347699" sldId="258"/>
+            <ac:cxnSpMk id="37" creationId="{AD0D9AB4-BDFE-6106-94AD-FD58BD7569A5}"/>
+          </ac:cxnSpMkLst>
+        </pc:cxnChg>
+        <pc:cxnChg chg="mod">
+          <ac:chgData name="CTA24 乙成 隼士" userId="61cf1e87-e946-4c54-a84e-b17cc486914d" providerId="ADAL" clId="{490A5E6A-DE08-485E-98A5-335649A1BFE8}" dt="2026-04-22T03:11:26.999" v="322" actId="1076"/>
+          <ac:cxnSpMkLst>
+            <pc:docMk/>
+            <pc:sldMk cId="691347699" sldId="258"/>
+            <ac:cxnSpMk id="38" creationId="{AB4A310D-8AC5-87E1-1846-BE8FD39E5DC2}"/>
+          </ac:cxnSpMkLst>
+        </pc:cxnChg>
+        <pc:cxnChg chg="add del mod">
+          <ac:chgData name="CTA24 乙成 隼士" userId="61cf1e87-e946-4c54-a84e-b17cc486914d" providerId="ADAL" clId="{490A5E6A-DE08-485E-98A5-335649A1BFE8}" dt="2026-04-22T03:12:43.128" v="330" actId="11529"/>
+          <ac:cxnSpMkLst>
+            <pc:docMk/>
+            <pc:sldMk cId="691347699" sldId="258"/>
+            <ac:cxnSpMk id="45" creationId="{F72AC0C6-59C7-6AF1-9B4A-BD2831EDAB0A}"/>
+          </ac:cxnSpMkLst>
+        </pc:cxnChg>
+        <pc:cxnChg chg="mod">
+          <ac:chgData name="CTA24 乙成 隼士" userId="61cf1e87-e946-4c54-a84e-b17cc486914d" providerId="ADAL" clId="{490A5E6A-DE08-485E-98A5-335649A1BFE8}" dt="2026-04-22T03:13:10.862" v="334" actId="14100"/>
+          <ac:cxnSpMkLst>
+            <pc:docMk/>
+            <pc:sldMk cId="691347699" sldId="258"/>
+            <ac:cxnSpMk id="50" creationId="{5E4D36E1-D37F-F50D-5A05-00249363F9D5}"/>
+          </ac:cxnSpMkLst>
+        </pc:cxnChg>
+        <pc:cxnChg chg="add del mod">
+          <ac:chgData name="CTA24 乙成 隼士" userId="61cf1e87-e946-4c54-a84e-b17cc486914d" providerId="ADAL" clId="{490A5E6A-DE08-485E-98A5-335649A1BFE8}" dt="2026-04-22T03:13:20.248" v="335" actId="478"/>
+          <ac:cxnSpMkLst>
+            <pc:docMk/>
+            <pc:sldMk cId="691347699" sldId="258"/>
+            <ac:cxnSpMk id="53" creationId="{39C54644-2466-06F3-6BF8-66BA81174C67}"/>
+          </ac:cxnSpMkLst>
+        </pc:cxnChg>
+      </pc:sldChg>
+      <pc:sldChg chg="addSp modSp mod">
+        <pc:chgData name="CTA24 乙成 隼士" userId="61cf1e87-e946-4c54-a84e-b17cc486914d" providerId="ADAL" clId="{490A5E6A-DE08-485E-98A5-335649A1BFE8}" dt="2026-04-22T02:59:25.910" v="27" actId="1076"/>
+        <pc:sldMkLst>
+          <pc:docMk/>
+          <pc:sldMk cId="1585013136" sldId="259"/>
+        </pc:sldMkLst>
+        <pc:spChg chg="add mod">
+          <ac:chgData name="CTA24 乙成 隼士" userId="61cf1e87-e946-4c54-a84e-b17cc486914d" providerId="ADAL" clId="{490A5E6A-DE08-485E-98A5-335649A1BFE8}" dt="2026-04-22T02:59:25.910" v="27" actId="1076"/>
+          <ac:spMkLst>
+            <pc:docMk/>
+            <pc:sldMk cId="1585013136" sldId="259"/>
+            <ac:spMk id="9" creationId="{AF5F7FE4-3C26-B0E6-074B-4BFFD3515E47}"/>
+          </ac:spMkLst>
+        </pc:spChg>
+        <pc:cxnChg chg="add mod">
+          <ac:chgData name="CTA24 乙成 隼士" userId="61cf1e87-e946-4c54-a84e-b17cc486914d" providerId="ADAL" clId="{490A5E6A-DE08-485E-98A5-335649A1BFE8}" dt="2026-04-22T02:59:25.910" v="27" actId="1076"/>
+          <ac:cxnSpMkLst>
+            <pc:docMk/>
+            <pc:sldMk cId="1585013136" sldId="259"/>
+            <ac:cxnSpMk id="12" creationId="{5CF90936-CCF6-41FE-099F-023062FAB034}"/>
+          </ac:cxnSpMkLst>
+        </pc:cxnChg>
+        <pc:cxnChg chg="mod">
+          <ac:chgData name="CTA24 乙成 隼士" userId="61cf1e87-e946-4c54-a84e-b17cc486914d" providerId="ADAL" clId="{490A5E6A-DE08-485E-98A5-335649A1BFE8}" dt="2026-04-22T02:55:38.376" v="0" actId="14100"/>
+          <ac:cxnSpMkLst>
+            <pc:docMk/>
+            <pc:sldMk cId="1585013136" sldId="259"/>
+            <ac:cxnSpMk id="15" creationId="{C2FE57E4-1BC8-43C5-9BC6-83F15F37CDED}"/>
+          </ac:cxnSpMkLst>
+        </pc:cxnChg>
+      </pc:sldChg>
+    </pc:docChg>
+  </pc:docChgLst>
+</pc:chgInfo>
+</file>
+
 <file path=ppt/notesMasters/notesMaster1.xml><?xml version="1.0" encoding="utf-8"?>
 <p:notesMaster xmlns:a="http://schemas.openxmlformats.org/drawingml/2006/main" xmlns:r="http://schemas.openxmlformats.org/officeDocument/2006/relationships" xmlns:p="http://schemas.openxmlformats.org/presentationml/2006/main">
   <p:cSld>
@@ -200,7 +523,7 @@
           <a:p>
             <a:fld id="{D9E98DA0-2674-4CAA-A141-6C83465A3524}" type="datetimeFigureOut">
               <a:rPr kumimoji="1" lang="ja-JP" altLang="en-US" smtClean="0"/>
-              <a:t>2026/4/21</a:t>
+              <a:t>2026/4/22</a:t>
             </a:fld>
             <a:endParaRPr kumimoji="1" lang="ja-JP" altLang="en-US"/>
           </a:p>
@@ -814,7 +1137,7 @@
           <a:p>
             <a:fld id="{CE6B9286-4115-4432-A6DB-AD860C79ABFA}" type="datetimeFigureOut">
               <a:rPr kumimoji="1" lang="ja-JP" altLang="en-US" smtClean="0"/>
-              <a:t>2026/4/21</a:t>
+              <a:t>2026/4/22</a:t>
             </a:fld>
             <a:endParaRPr kumimoji="1" lang="ja-JP" altLang="en-US"/>
           </a:p>
@@ -1044,7 +1367,7 @@
           <a:p>
             <a:fld id="{CE6B9286-4115-4432-A6DB-AD860C79ABFA}" type="datetimeFigureOut">
               <a:rPr kumimoji="1" lang="ja-JP" altLang="en-US" smtClean="0"/>
-              <a:t>2026/4/21</a:t>
+              <a:t>2026/4/22</a:t>
             </a:fld>
             <a:endParaRPr kumimoji="1" lang="ja-JP" altLang="en-US"/>
           </a:p>
@@ -1284,7 +1607,7 @@
           <a:p>
             <a:fld id="{CE6B9286-4115-4432-A6DB-AD860C79ABFA}" type="datetimeFigureOut">
               <a:rPr kumimoji="1" lang="ja-JP" altLang="en-US" smtClean="0"/>
-              <a:t>2026/4/21</a:t>
+              <a:t>2026/4/22</a:t>
             </a:fld>
             <a:endParaRPr kumimoji="1" lang="ja-JP" altLang="en-US"/>
           </a:p>
@@ -1514,7 +1837,7 @@
           <a:p>
             <a:fld id="{CE6B9286-4115-4432-A6DB-AD860C79ABFA}" type="datetimeFigureOut">
               <a:rPr kumimoji="1" lang="ja-JP" altLang="en-US" smtClean="0"/>
-              <a:t>2026/4/21</a:t>
+              <a:t>2026/4/22</a:t>
             </a:fld>
             <a:endParaRPr kumimoji="1" lang="ja-JP" altLang="en-US"/>
           </a:p>
@@ -1789,7 +2112,7 @@
           <a:p>
             <a:fld id="{CE6B9286-4115-4432-A6DB-AD860C79ABFA}" type="datetimeFigureOut">
               <a:rPr kumimoji="1" lang="ja-JP" altLang="en-US" smtClean="0"/>
-              <a:t>2026/4/21</a:t>
+              <a:t>2026/4/22</a:t>
             </a:fld>
             <a:endParaRPr kumimoji="1" lang="ja-JP" altLang="en-US"/>
           </a:p>
@@ -2118,7 +2441,7 @@
           <a:p>
             <a:fld id="{CE6B9286-4115-4432-A6DB-AD860C79ABFA}" type="datetimeFigureOut">
               <a:rPr kumimoji="1" lang="ja-JP" altLang="en-US" smtClean="0"/>
-              <a:t>2026/4/21</a:t>
+              <a:t>2026/4/22</a:t>
             </a:fld>
             <a:endParaRPr kumimoji="1" lang="ja-JP" altLang="en-US"/>
           </a:p>
@@ -2594,7 +2917,7 @@
           <a:p>
             <a:fld id="{CE6B9286-4115-4432-A6DB-AD860C79ABFA}" type="datetimeFigureOut">
               <a:rPr kumimoji="1" lang="ja-JP" altLang="en-US" smtClean="0"/>
-              <a:t>2026/4/21</a:t>
+              <a:t>2026/4/22</a:t>
             </a:fld>
             <a:endParaRPr kumimoji="1" lang="ja-JP" altLang="en-US"/>
           </a:p>
@@ -2735,7 +3058,7 @@
           <a:p>
             <a:fld id="{CE6B9286-4115-4432-A6DB-AD860C79ABFA}" type="datetimeFigureOut">
               <a:rPr kumimoji="1" lang="ja-JP" altLang="en-US" smtClean="0"/>
-              <a:t>2026/4/21</a:t>
+              <a:t>2026/4/22</a:t>
             </a:fld>
             <a:endParaRPr kumimoji="1" lang="ja-JP" altLang="en-US"/>
           </a:p>
@@ -2848,7 +3171,7 @@
           <a:p>
             <a:fld id="{CE6B9286-4115-4432-A6DB-AD860C79ABFA}" type="datetimeFigureOut">
               <a:rPr kumimoji="1" lang="ja-JP" altLang="en-US" smtClean="0"/>
-              <a:t>2026/4/21</a:t>
+              <a:t>2026/4/22</a:t>
             </a:fld>
             <a:endParaRPr kumimoji="1" lang="ja-JP" altLang="en-US"/>
           </a:p>
@@ -3191,7 +3514,7 @@
           <a:p>
             <a:fld id="{CE6B9286-4115-4432-A6DB-AD860C79ABFA}" type="datetimeFigureOut">
               <a:rPr kumimoji="1" lang="ja-JP" altLang="en-US" smtClean="0"/>
-              <a:t>2026/4/21</a:t>
+              <a:t>2026/4/22</a:t>
             </a:fld>
             <a:endParaRPr kumimoji="1" lang="ja-JP" altLang="en-US"/>
           </a:p>
@@ -3479,7 +3802,7 @@
           <a:p>
             <a:fld id="{CE6B9286-4115-4432-A6DB-AD860C79ABFA}" type="datetimeFigureOut">
               <a:rPr kumimoji="1" lang="ja-JP" altLang="en-US" smtClean="0"/>
-              <a:t>2026/4/21</a:t>
+              <a:t>2026/4/22</a:t>
             </a:fld>
             <a:endParaRPr kumimoji="1" lang="ja-JP" altLang="en-US"/>
           </a:p>
@@ -3752,7 +4075,7 @@
           <a:p>
             <a:fld id="{CE6B9286-4115-4432-A6DB-AD860C79ABFA}" type="datetimeFigureOut">
               <a:rPr kumimoji="1" lang="ja-JP" altLang="en-US" smtClean="0"/>
-              <a:t>2026/4/21</a:t>
+              <a:t>2026/4/22</a:t>
             </a:fld>
             <a:endParaRPr kumimoji="1" lang="ja-JP" altLang="en-US"/>
           </a:p>
@@ -4587,9 +4910,9 @@
         <p:grpSpPr>
           <a:xfrm>
             <a:off x="5024196" y="4169510"/>
-            <a:ext cx="2176287" cy="1584140"/>
+            <a:ext cx="2176287" cy="1861139"/>
             <a:chOff x="548639" y="404262"/>
-            <a:chExt cx="1886552" cy="1822872"/>
+            <a:chExt cx="1886552" cy="2141615"/>
           </a:xfrm>
         </p:grpSpPr>
         <p:sp>
@@ -4657,7 +4980,7 @@
           <p:spPr>
             <a:xfrm>
               <a:off x="548639" y="1164657"/>
-              <a:ext cx="1886552" cy="1062477"/>
+              <a:ext cx="1886552" cy="1381220"/>
             </a:xfrm>
             <a:prstGeom prst="rect">
               <a:avLst/>
@@ -4669,6 +4992,17 @@
               <a:spAutoFit/>
             </a:bodyPr>
             <a:lstStyle/>
+            <a:p>
+              <a:pPr marL="285750" indent="-285750">
+                <a:buFont typeface="Arial" panose="020B0604020202020204" pitchFamily="34" charset="0"/>
+                <a:buChar char="•"/>
+              </a:pPr>
+              <a:r>
+                <a:rPr kumimoji="1" lang="ja-JP" altLang="en-US" dirty="0"/>
+                <a:t>メールアドレス</a:t>
+              </a:r>
+              <a:endParaRPr kumimoji="1" lang="en-US" altLang="ja-JP" dirty="0"/>
+            </a:p>
             <a:p>
               <a:pPr marL="285750" indent="-285750">
                 <a:buFont typeface="Arial" panose="020B0604020202020204" pitchFamily="34" charset="0"/>
@@ -4884,9 +5218,9 @@
         <p:grpSpPr>
           <a:xfrm>
             <a:off x="7986184" y="1267862"/>
-            <a:ext cx="3934883" cy="2415136"/>
+            <a:ext cx="3934883" cy="3523132"/>
             <a:chOff x="548639" y="404262"/>
-            <a:chExt cx="1886552" cy="2779100"/>
+            <a:chExt cx="1886552" cy="4054072"/>
           </a:xfrm>
         </p:grpSpPr>
         <p:sp>
@@ -4911,19 +5245,17 @@
             </a:prstGeom>
           </p:spPr>
           <p:style>
-            <a:lnRef idx="2">
-              <a:schemeClr val="accent1">
-                <a:shade val="15000"/>
-              </a:schemeClr>
+            <a:lnRef idx="1">
+              <a:schemeClr val="accent1"/>
             </a:lnRef>
-            <a:fillRef idx="1">
+            <a:fillRef idx="2">
               <a:schemeClr val="accent1"/>
             </a:fillRef>
-            <a:effectRef idx="0">
+            <a:effectRef idx="1">
               <a:schemeClr val="accent1"/>
             </a:effectRef>
             <a:fontRef idx="minor">
-              <a:schemeClr val="lt1"/>
+              <a:schemeClr val="dk1"/>
             </a:fontRef>
           </p:style>
           <p:txBody>
@@ -4953,7 +5285,7 @@
           <p:spPr>
             <a:xfrm>
               <a:off x="548639" y="1164657"/>
-              <a:ext cx="1886552" cy="2018705"/>
+              <a:ext cx="1886552" cy="3293677"/>
             </a:xfrm>
             <a:prstGeom prst="rect">
               <a:avLst/>
@@ -4990,6 +5322,42 @@
                 <a:rPr lang="en-US" altLang="ja-JP" dirty="0"/>
                 <a:t>)</a:t>
               </a:r>
+            </a:p>
+            <a:p>
+              <a:pPr marL="742950" lvl="1" indent="-285750">
+                <a:buFont typeface="Arial" panose="020B0604020202020204" pitchFamily="34" charset="0"/>
+                <a:buChar char="•"/>
+              </a:pPr>
+              <a:r>
+                <a:rPr lang="ja-JP" altLang="en-US" dirty="0"/>
+                <a:t>ユーザ</a:t>
+              </a:r>
+              <a:r>
+                <a:rPr lang="en-US" altLang="ja-JP" dirty="0"/>
+                <a:t>ID</a:t>
+              </a:r>
+              <a:r>
+                <a:rPr lang="ja-JP" altLang="en-US" dirty="0"/>
+                <a:t>検索</a:t>
+              </a:r>
+              <a:endParaRPr lang="en-US" altLang="ja-JP" dirty="0"/>
+            </a:p>
+            <a:p>
+              <a:pPr marL="742950" lvl="1" indent="-285750">
+                <a:buFont typeface="Arial" panose="020B0604020202020204" pitchFamily="34" charset="0"/>
+                <a:buChar char="•"/>
+              </a:pPr>
+              <a:r>
+                <a:rPr kumimoji="1" lang="ja-JP" altLang="en-US" dirty="0"/>
+                <a:t>ブログの検索</a:t>
+              </a:r>
+              <a:endParaRPr kumimoji="1" lang="en-US" altLang="ja-JP" dirty="0"/>
+            </a:p>
+            <a:p>
+              <a:pPr marL="742950" lvl="1" indent="-285750">
+                <a:buFont typeface="Arial" panose="020B0604020202020204" pitchFamily="34" charset="0"/>
+                <a:buChar char="•"/>
+              </a:pPr>
               <a:endParaRPr kumimoji="1" lang="en-US" altLang="ja-JP" dirty="0"/>
             </a:p>
             <a:p>
@@ -5016,6 +5384,13 @@
                 <a:rPr kumimoji="1" lang="en-US" altLang="ja-JP" dirty="0"/>
                 <a:t>)</a:t>
               </a:r>
+            </a:p>
+            <a:p>
+              <a:pPr marL="285750" indent="-285750">
+                <a:buFont typeface="Arial" panose="020B0604020202020204" pitchFamily="34" charset="0"/>
+                <a:buChar char="•"/>
+              </a:pPr>
+              <a:endParaRPr kumimoji="1" lang="en-US" altLang="ja-JP" dirty="0"/>
             </a:p>
             <a:p>
               <a:pPr marL="285750" indent="-285750">
@@ -5342,148 +5717,6 @@
           </a:p>
         </p:txBody>
       </p:sp>
-      <p:grpSp>
-        <p:nvGrpSpPr>
-          <p:cNvPr id="12" name="グループ化 11">
-            <a:extLst>
-              <a:ext uri="{FF2B5EF4-FFF2-40B4-BE49-F238E27FC236}">
-                <a16:creationId xmlns:a16="http://schemas.microsoft.com/office/drawing/2014/main" id="{3A05A791-C433-B48B-A3D7-CC58106B1C19}"/>
-              </a:ext>
-            </a:extLst>
-          </p:cNvPr>
-          <p:cNvGrpSpPr/>
-          <p:nvPr/>
-        </p:nvGrpSpPr>
-        <p:grpSpPr>
-          <a:xfrm>
-            <a:off x="7986184" y="4155219"/>
-            <a:ext cx="2749550" cy="1307141"/>
-            <a:chOff x="548639" y="404262"/>
-            <a:chExt cx="1886552" cy="1504129"/>
-          </a:xfrm>
-        </p:grpSpPr>
-        <p:sp>
-          <p:nvSpPr>
-            <p:cNvPr id="13" name="正方形/長方形 12">
-              <a:extLst>
-                <a:ext uri="{FF2B5EF4-FFF2-40B4-BE49-F238E27FC236}">
-                  <a16:creationId xmlns:a16="http://schemas.microsoft.com/office/drawing/2014/main" id="{C025D16C-2F83-5B82-1029-796A2AAA5B83}"/>
-                </a:ext>
-              </a:extLst>
-            </p:cNvPr>
-            <p:cNvSpPr/>
-            <p:nvPr/>
-          </p:nvSpPr>
-          <p:spPr>
-            <a:xfrm>
-              <a:off x="548639" y="404262"/>
-              <a:ext cx="1886552" cy="635265"/>
-            </a:xfrm>
-            <a:prstGeom prst="rect">
-              <a:avLst/>
-            </a:prstGeom>
-          </p:spPr>
-          <p:style>
-            <a:lnRef idx="2">
-              <a:schemeClr val="accent1">
-                <a:shade val="15000"/>
-              </a:schemeClr>
-            </a:lnRef>
-            <a:fillRef idx="1">
-              <a:schemeClr val="accent1"/>
-            </a:fillRef>
-            <a:effectRef idx="0">
-              <a:schemeClr val="accent1"/>
-            </a:effectRef>
-            <a:fontRef idx="minor">
-              <a:schemeClr val="lt1"/>
-            </a:fontRef>
-          </p:style>
-          <p:txBody>
-            <a:bodyPr rtlCol="0" anchor="ctr"/>
-            <a:lstStyle/>
-            <a:p>
-              <a:pPr algn="ctr"/>
-              <a:r>
-                <a:rPr lang="ja-JP" altLang="en-US" dirty="0"/>
-                <a:t>検索</a:t>
-              </a:r>
-              <a:r>
-                <a:rPr lang="en-US" altLang="ja-JP" dirty="0"/>
-                <a:t>(</a:t>
-              </a:r>
-              <a:r>
-                <a:rPr lang="ja-JP" altLang="en-US" dirty="0"/>
-                <a:t>ヘッダ</a:t>
-              </a:r>
-              <a:r>
-                <a:rPr lang="en-US" altLang="ja-JP" dirty="0"/>
-                <a:t>)</a:t>
-              </a:r>
-              <a:endParaRPr kumimoji="1" lang="ja-JP" altLang="en-US" dirty="0"/>
-            </a:p>
-          </p:txBody>
-        </p:sp>
-        <p:sp>
-          <p:nvSpPr>
-            <p:cNvPr id="43" name="テキスト ボックス 42">
-              <a:extLst>
-                <a:ext uri="{FF2B5EF4-FFF2-40B4-BE49-F238E27FC236}">
-                  <a16:creationId xmlns:a16="http://schemas.microsoft.com/office/drawing/2014/main" id="{52B0ABD9-5454-2B61-4200-ED5547A1D9D6}"/>
-                </a:ext>
-              </a:extLst>
-            </p:cNvPr>
-            <p:cNvSpPr txBox="1"/>
-            <p:nvPr/>
-          </p:nvSpPr>
-          <p:spPr>
-            <a:xfrm>
-              <a:off x="548639" y="1164657"/>
-              <a:ext cx="1886552" cy="743734"/>
-            </a:xfrm>
-            <a:prstGeom prst="rect">
-              <a:avLst/>
-            </a:prstGeom>
-            <a:noFill/>
-          </p:spPr>
-          <p:txBody>
-            <a:bodyPr wrap="square" rtlCol="0">
-              <a:spAutoFit/>
-            </a:bodyPr>
-            <a:lstStyle/>
-            <a:p>
-              <a:pPr marL="285750" indent="-285750">
-                <a:buFont typeface="Arial" panose="020B0604020202020204" pitchFamily="34" charset="0"/>
-                <a:buChar char="•"/>
-              </a:pPr>
-              <a:r>
-                <a:rPr kumimoji="1" lang="ja-JP" altLang="en-US" dirty="0"/>
-                <a:t>ユーザ</a:t>
-              </a:r>
-              <a:r>
-                <a:rPr kumimoji="1" lang="en-US" altLang="ja-JP" dirty="0"/>
-                <a:t>ID</a:t>
-              </a:r>
-              <a:r>
-                <a:rPr kumimoji="1" lang="ja-JP" altLang="en-US" dirty="0"/>
-                <a:t>検索</a:t>
-              </a:r>
-              <a:endParaRPr kumimoji="1" lang="en-US" altLang="ja-JP" dirty="0"/>
-            </a:p>
-            <a:p>
-              <a:pPr marL="285750" indent="-285750">
-                <a:buFont typeface="Arial" panose="020B0604020202020204" pitchFamily="34" charset="0"/>
-                <a:buChar char="•"/>
-              </a:pPr>
-              <a:r>
-                <a:rPr kumimoji="1" lang="ja-JP" altLang="en-US" dirty="0"/>
-                <a:t>ブログの検索</a:t>
-              </a:r>
-              <a:endParaRPr kumimoji="1" lang="en-US" altLang="ja-JP" dirty="0"/>
-            </a:p>
-          </p:txBody>
-        </p:sp>
-      </p:grpSp>
     </p:spTree>
     <p:extLst>
       <p:ext uri="{BB962C8B-B14F-4D97-AF65-F5344CB8AC3E}">
@@ -5682,6 +5915,14 @@
               </a:r>
               <a:r>
                 <a:rPr lang="en-US" altLang="ja-JP" dirty="0"/>
+                <a:t>)(</a:t>
+              </a:r>
+              <a:r>
+                <a:rPr lang="ja-JP" altLang="en-US" dirty="0"/>
+                <a:t>最新のチャット内容も表示</a:t>
+              </a:r>
+              <a:r>
+                <a:rPr lang="en-US" altLang="ja-JP" dirty="0"/>
                 <a:t>)</a:t>
               </a:r>
             </a:p>
@@ -5692,19 +5933,9 @@
               </a:pPr>
               <a:r>
                 <a:rPr lang="ja-JP" altLang="en-US" dirty="0"/>
-                <a:t>グループ編集リンク</a:t>
-              </a:r>
-              <a:endParaRPr lang="en-US" altLang="ja-JP" dirty="0"/>
-            </a:p>
-            <a:p>
-              <a:pPr marL="285750" indent="-285750">
-                <a:buFont typeface="Arial" panose="020B0604020202020204" pitchFamily="34" charset="0"/>
-                <a:buChar char="•"/>
-              </a:pPr>
-              <a:r>
-                <a:rPr kumimoji="1" lang="ja-JP" altLang="en-US" dirty="0"/>
-                <a:t>検索</a:t>
-              </a:r>
+                <a:t>グループ作成リンク</a:t>
+              </a:r>
+              <a:endParaRPr kumimoji="1" lang="ja-JP" altLang="en-US" dirty="0"/>
             </a:p>
           </p:txBody>
         </p:sp>
@@ -5723,10 +5954,10 @@
         </p:nvGrpSpPr>
         <p:grpSpPr>
           <a:xfrm>
-            <a:off x="3651248" y="1648863"/>
-            <a:ext cx="2622551" cy="3523132"/>
+            <a:off x="4003194" y="1196536"/>
+            <a:ext cx="2622551" cy="3246133"/>
             <a:chOff x="548639" y="404262"/>
-            <a:chExt cx="1886552" cy="4054072"/>
+            <a:chExt cx="1886552" cy="3735329"/>
           </a:xfrm>
         </p:grpSpPr>
         <p:sp>
@@ -5793,7 +6024,7 @@
           <p:spPr>
             <a:xfrm>
               <a:off x="548639" y="1164657"/>
-              <a:ext cx="1886552" cy="3293677"/>
+              <a:ext cx="1886552" cy="2974934"/>
             </a:xfrm>
             <a:prstGeom prst="rect">
               <a:avLst/>
@@ -5852,7 +6083,7 @@
               </a:pPr>
               <a:r>
                 <a:rPr lang="ja-JP" altLang="en-US" dirty="0"/>
-                <a:t>画像添付</a:t>
+                <a:t>画像添付グループ編集リンク</a:t>
               </a:r>
               <a:endParaRPr lang="en-US" altLang="ja-JP" dirty="0"/>
             </a:p>
@@ -5862,32 +6093,10 @@
                 <a:buChar char="•"/>
               </a:pPr>
               <a:r>
-                <a:rPr lang="ja-JP" altLang="en-US" dirty="0"/>
-                <a:t>メンバ一覧リンク</a:t>
-              </a:r>
-              <a:endParaRPr lang="en-US" altLang="ja-JP" dirty="0"/>
-            </a:p>
-            <a:p>
-              <a:pPr marL="285750" indent="-285750">
-                <a:buFont typeface="Arial" panose="020B0604020202020204" pitchFamily="34" charset="0"/>
-                <a:buChar char="•"/>
-              </a:pPr>
-              <a:r>
-                <a:rPr lang="ja-JP" altLang="en-US" dirty="0"/>
-                <a:t>グループ編集リンク</a:t>
-              </a:r>
-              <a:endParaRPr lang="en-US" altLang="ja-JP" dirty="0"/>
-            </a:p>
-            <a:p>
-              <a:pPr marL="285750" indent="-285750">
-                <a:buFont typeface="Arial" panose="020B0604020202020204" pitchFamily="34" charset="0"/>
-                <a:buChar char="•"/>
-              </a:pPr>
-              <a:r>
-                <a:rPr lang="ja-JP" altLang="en-US" dirty="0"/>
+                <a:rPr lang="ja-JP" altLang="en-US" b="1" dirty="0"/>
                 <a:t>アイコン押したら相手のプロフィールに行く</a:t>
               </a:r>
-              <a:endParaRPr lang="en-US" altLang="ja-JP" dirty="0"/>
+              <a:endParaRPr lang="en-US" altLang="ja-JP" b="1" dirty="0"/>
             </a:p>
             <a:p>
               <a:pPr marL="285750" indent="-285750">
@@ -5922,7 +6131,7 @@
         <p:spPr>
           <a:xfrm>
             <a:off x="3175000" y="1095165"/>
-            <a:ext cx="1787524" cy="553698"/>
+            <a:ext cx="2139470" cy="101371"/>
           </a:xfrm>
           <a:prstGeom prst="bentConnector2">
             <a:avLst/>
@@ -5960,10 +6169,10 @@
         </p:nvGrpSpPr>
         <p:grpSpPr>
           <a:xfrm>
-            <a:off x="6722866" y="1648863"/>
-            <a:ext cx="4403938" cy="1307141"/>
+            <a:off x="6750047" y="1196536"/>
+            <a:ext cx="4403938" cy="2138138"/>
             <a:chOff x="548639" y="404262"/>
-            <a:chExt cx="1886552" cy="1504129"/>
+            <a:chExt cx="1886552" cy="2460358"/>
           </a:xfrm>
         </p:grpSpPr>
         <p:sp>
@@ -6010,7 +6219,7 @@
               <a:pPr algn="ctr"/>
               <a:r>
                 <a:rPr lang="ja-JP" altLang="en-US" dirty="0"/>
-                <a:t>グループ一覧</a:t>
+                <a:t>グループ作成</a:t>
               </a:r>
               <a:endParaRPr kumimoji="1" lang="ja-JP" altLang="en-US" dirty="0"/>
             </a:p>
@@ -6031,7 +6240,7 @@
           <p:spPr>
             <a:xfrm>
               <a:off x="548639" y="1164657"/>
-              <a:ext cx="1886552" cy="743734"/>
+              <a:ext cx="1886552" cy="1699963"/>
             </a:xfrm>
             <a:prstGeom prst="rect">
               <a:avLst/>
@@ -6049,24 +6258,8 @@
                 <a:buChar char="•"/>
               </a:pPr>
               <a:r>
-                <a:rPr kumimoji="1" lang="ja-JP" altLang="en-US" dirty="0"/>
-                <a:t>クローズグループ</a:t>
-              </a:r>
-              <a:r>
-                <a:rPr kumimoji="1" lang="en-US" altLang="ja-JP" dirty="0"/>
-                <a:t>(</a:t>
-              </a:r>
-              <a:r>
-                <a:rPr kumimoji="1" lang="ja-JP" altLang="en-US" dirty="0"/>
-                <a:t>参加済み</a:t>
-              </a:r>
-              <a:r>
-                <a:rPr kumimoji="1" lang="en-US" altLang="ja-JP" dirty="0"/>
-                <a:t>)</a:t>
-              </a:r>
-              <a:r>
-                <a:rPr kumimoji="1" lang="ja-JP" altLang="en-US" dirty="0"/>
-                <a:t>一覧</a:t>
+                <a:rPr lang="ja-JP" altLang="en-US" dirty="0"/>
+                <a:t>グループ名</a:t>
               </a:r>
               <a:endParaRPr lang="en-US" altLang="ja-JP" dirty="0"/>
             </a:p>
@@ -6077,8 +6270,50 @@
               </a:pPr>
               <a:r>
                 <a:rPr kumimoji="1" lang="ja-JP" altLang="en-US" dirty="0"/>
-                <a:t>グループ作成</a:t>
-              </a:r>
+                <a:t>アイコン</a:t>
+              </a:r>
+              <a:endParaRPr kumimoji="1" lang="en-US" altLang="ja-JP" dirty="0"/>
+            </a:p>
+            <a:p>
+              <a:pPr marL="285750" indent="-285750">
+                <a:buFont typeface="Arial" panose="020B0604020202020204" pitchFamily="34" charset="0"/>
+                <a:buChar char="•"/>
+              </a:pPr>
+              <a:r>
+                <a:rPr kumimoji="1" lang="ja-JP" altLang="en-US" dirty="0"/>
+                <a:t>公開</a:t>
+              </a:r>
+              <a:r>
+                <a:rPr kumimoji="1" lang="en-US" altLang="ja-JP" dirty="0"/>
+                <a:t>/</a:t>
+              </a:r>
+              <a:r>
+                <a:rPr kumimoji="1" lang="ja-JP" altLang="en-US" dirty="0"/>
+                <a:t>非公開設定</a:t>
+              </a:r>
+              <a:endParaRPr kumimoji="1" lang="en-US" altLang="ja-JP" dirty="0"/>
+            </a:p>
+            <a:p>
+              <a:pPr marL="285750" indent="-285750">
+                <a:buFont typeface="Arial" panose="020B0604020202020204" pitchFamily="34" charset="0"/>
+                <a:buChar char="•"/>
+              </a:pPr>
+              <a:r>
+                <a:rPr lang="ja-JP" altLang="en-US" dirty="0"/>
+                <a:t>招待するユーザ</a:t>
+              </a:r>
+              <a:r>
+                <a:rPr lang="en-US" altLang="ja-JP" dirty="0"/>
+                <a:t>ID</a:t>
+              </a:r>
+              <a:endParaRPr kumimoji="1" lang="en-US" altLang="ja-JP" dirty="0"/>
+            </a:p>
+            <a:p>
+              <a:pPr marL="285750" indent="-285750">
+                <a:buFont typeface="Arial" panose="020B0604020202020204" pitchFamily="34" charset="0"/>
+                <a:buChar char="•"/>
+              </a:pPr>
+              <a:endParaRPr kumimoji="1" lang="ja-JP" altLang="en-US" dirty="0"/>
             </a:p>
           </p:txBody>
         </p:sp>
@@ -6102,7 +6337,7 @@
         <p:spPr>
           <a:xfrm>
             <a:off x="3175000" y="1095165"/>
-            <a:ext cx="5749835" cy="553698"/>
+            <a:ext cx="5777016" cy="101371"/>
           </a:xfrm>
           <a:prstGeom prst="bentConnector2">
             <a:avLst/>
@@ -6140,7 +6375,7 @@
         </p:nvGrpSpPr>
         <p:grpSpPr>
           <a:xfrm>
-            <a:off x="7276675" y="3064745"/>
+            <a:off x="7303856" y="3167630"/>
             <a:ext cx="3850129" cy="3523132"/>
             <a:chOff x="548639" y="404262"/>
             <a:chExt cx="1886552" cy="4054072"/>
@@ -6261,7 +6496,7 @@
               </a:r>
               <a:r>
                 <a:rPr lang="ja-JP" altLang="en-US" dirty="0"/>
-                <a:t>、削除</a:t>
+                <a:t>、削除、権限</a:t>
               </a:r>
               <a:r>
                 <a:rPr lang="en-US" altLang="ja-JP" dirty="0"/>
@@ -6307,6 +6542,32 @@
                 <a:rPr kumimoji="1" lang="ja-JP" altLang="en-US" dirty="0"/>
                 <a:t>アイコン変更</a:t>
               </a:r>
+              <a:endParaRPr kumimoji="1" lang="en-US" altLang="ja-JP"/>
+            </a:p>
+            <a:p>
+              <a:pPr marL="742950" lvl="1" indent="-285750">
+                <a:buFont typeface="Arial" panose="020B0604020202020204" pitchFamily="34" charset="0"/>
+                <a:buChar char="•"/>
+              </a:pPr>
+              <a:r>
+                <a:rPr kumimoji="1" lang="ja-JP" altLang="en-US"/>
+                <a:t>グループ</a:t>
+              </a:r>
+              <a:r>
+                <a:rPr kumimoji="1" lang="ja-JP" altLang="en-US" dirty="0"/>
+                <a:t>削除</a:t>
+              </a:r>
+              <a:endParaRPr lang="en-US" altLang="ja-JP" dirty="0"/>
+            </a:p>
+            <a:p>
+              <a:pPr marL="285750" indent="-285750">
+                <a:buFont typeface="Arial" panose="020B0604020202020204" pitchFamily="34" charset="0"/>
+                <a:buChar char="•"/>
+              </a:pPr>
+              <a:r>
+                <a:rPr kumimoji="1" lang="ja-JP" altLang="en-US" dirty="0"/>
+                <a:t>メンバ</a:t>
+              </a:r>
               <a:endParaRPr kumimoji="1" lang="en-US" altLang="ja-JP" dirty="0"/>
             </a:p>
             <a:p>
@@ -6315,30 +6576,8 @@
                 <a:buChar char="•"/>
               </a:pPr>
               <a:r>
-                <a:rPr lang="ja-JP" altLang="en-US" dirty="0"/>
-                <a:t>権限の管理</a:t>
-              </a:r>
-              <a:endParaRPr lang="en-US" altLang="ja-JP" dirty="0"/>
-            </a:p>
-            <a:p>
-              <a:pPr marL="742950" lvl="1" indent="-285750">
-                <a:buFont typeface="Arial" panose="020B0604020202020204" pitchFamily="34" charset="0"/>
-                <a:buChar char="•"/>
-              </a:pPr>
-              <a:r>
                 <a:rPr kumimoji="1" lang="ja-JP" altLang="en-US" dirty="0"/>
-                <a:t>グループ削除</a:t>
-              </a:r>
-              <a:endParaRPr lang="en-US" altLang="ja-JP" dirty="0"/>
-            </a:p>
-            <a:p>
-              <a:pPr marL="285750" indent="-285750">
-                <a:buFont typeface="Arial" panose="020B0604020202020204" pitchFamily="34" charset="0"/>
-                <a:buChar char="•"/>
-              </a:pPr>
-              <a:r>
-                <a:rPr kumimoji="1" lang="ja-JP" altLang="en-US" dirty="0"/>
-                <a:t>メンバ</a:t>
+                <a:t>メンバー一覧</a:t>
               </a:r>
               <a:endParaRPr kumimoji="1" lang="en-US" altLang="ja-JP" dirty="0"/>
             </a:p>
@@ -6373,9 +6612,9 @@
           <p:nvPr/>
         </p:nvCxnSpPr>
         <p:spPr>
-          <a:xfrm flipV="1">
-            <a:off x="6273799" y="3340780"/>
-            <a:ext cx="1002876" cy="400054"/>
+          <a:xfrm>
+            <a:off x="6625745" y="3150008"/>
+            <a:ext cx="678111" cy="293657"/>
           </a:xfrm>
           <a:prstGeom prst="bentConnector3">
             <a:avLst>
@@ -6671,12 +6910,14 @@
           <p:nvPr/>
         </p:nvCxnSpPr>
         <p:spPr>
-          <a:xfrm rot="10800000">
-            <a:off x="3149810" y="3279248"/>
-            <a:ext cx="501438" cy="461587"/>
+          <a:xfrm rot="10800000" flipV="1">
+            <a:off x="3149810" y="3150007"/>
+            <a:ext cx="853384" cy="129239"/>
           </a:xfrm>
           <a:prstGeom prst="bentConnector3">
-            <a:avLst/>
+            <a:avLst>
+              <a:gd name="adj1" fmla="val 50000"/>
+            </a:avLst>
           </a:prstGeom>
           <a:ln>
             <a:tailEnd type="triangle"/>
@@ -6711,7 +6952,7 @@
         </p:nvGrpSpPr>
         <p:grpSpPr>
           <a:xfrm>
-            <a:off x="3774967" y="5280736"/>
+            <a:off x="3645654" y="4792597"/>
             <a:ext cx="3335318" cy="1584140"/>
             <a:chOff x="548639" y="404262"/>
             <a:chExt cx="1886552" cy="1822872"/>
@@ -6842,19 +7083,155 @@
           <p:cNvCxnSpPr>
             <a:cxnSpLocks/>
             <a:stCxn id="48" idx="1"/>
-            <a:endCxn id="20" idx="0"/>
+            <a:endCxn id="20" idx="1"/>
           </p:cNvCxnSpPr>
           <p:nvPr/>
         </p:nvCxnSpPr>
         <p:spPr>
           <a:xfrm rot="10800000" flipH="1">
-            <a:off x="3774966" y="1648864"/>
-            <a:ext cx="1187557" cy="3907907"/>
+            <a:off x="3645654" y="1472571"/>
+            <a:ext cx="357540" cy="3596060"/>
           </a:xfrm>
-          <a:prstGeom prst="bentConnector4">
+          <a:prstGeom prst="bentConnector3">
             <a:avLst>
-              <a:gd name="adj1" fmla="val -24805"/>
-              <a:gd name="adj2" fmla="val 105850"/>
+              <a:gd name="adj1" fmla="val -47784"/>
+            </a:avLst>
+          </a:prstGeom>
+          <a:ln>
+            <a:tailEnd type="triangle"/>
+          </a:ln>
+        </p:spPr>
+        <p:style>
+          <a:lnRef idx="2">
+            <a:schemeClr val="accent1"/>
+          </a:lnRef>
+          <a:fillRef idx="0">
+            <a:schemeClr val="accent1"/>
+          </a:fillRef>
+          <a:effectRef idx="1">
+            <a:schemeClr val="accent1"/>
+          </a:effectRef>
+          <a:fontRef idx="minor">
+            <a:schemeClr val="tx1"/>
+          </a:fontRef>
+        </p:style>
+      </p:cxnSp>
+      <p:sp>
+        <p:nvSpPr>
+          <p:cNvPr id="13" name="テキスト ボックス 12">
+            <a:extLst>
+              <a:ext uri="{FF2B5EF4-FFF2-40B4-BE49-F238E27FC236}">
+                <a16:creationId xmlns:a16="http://schemas.microsoft.com/office/drawing/2014/main" id="{06873856-9E74-4B1C-29AF-E25B49BDBE9C}"/>
+              </a:ext>
+            </a:extLst>
+          </p:cNvPr>
+          <p:cNvSpPr txBox="1"/>
+          <p:nvPr/>
+        </p:nvSpPr>
+        <p:spPr>
+          <a:xfrm>
+            <a:off x="3706941" y="1002532"/>
+            <a:ext cx="2749550" cy="369332"/>
+          </a:xfrm>
+          <a:prstGeom prst="rect">
+            <a:avLst/>
+          </a:prstGeom>
+          <a:noFill/>
+        </p:spPr>
+        <p:txBody>
+          <a:bodyPr wrap="square" rtlCol="0">
+            <a:spAutoFit/>
+          </a:bodyPr>
+          <a:lstStyle/>
+          <a:p>
+            <a:endParaRPr kumimoji="1" lang="en-US" altLang="ja-JP" dirty="0"/>
+          </a:p>
+        </p:txBody>
+      </p:sp>
+      <p:sp>
+        <p:nvSpPr>
+          <p:cNvPr id="14" name="正方形/長方形 13">
+            <a:extLst>
+              <a:ext uri="{FF2B5EF4-FFF2-40B4-BE49-F238E27FC236}">
+                <a16:creationId xmlns:a16="http://schemas.microsoft.com/office/drawing/2014/main" id="{34151340-92C4-AEF6-D090-52104F552D32}"/>
+              </a:ext>
+            </a:extLst>
+          </p:cNvPr>
+          <p:cNvSpPr/>
+          <p:nvPr/>
+        </p:nvSpPr>
+        <p:spPr>
+          <a:xfrm>
+            <a:off x="425450" y="6303111"/>
+            <a:ext cx="2622550" cy="552068"/>
+          </a:xfrm>
+          <a:prstGeom prst="rect">
+            <a:avLst/>
+          </a:prstGeom>
+        </p:spPr>
+        <p:style>
+          <a:lnRef idx="1">
+            <a:schemeClr val="accent1"/>
+          </a:lnRef>
+          <a:fillRef idx="2">
+            <a:schemeClr val="accent1"/>
+          </a:fillRef>
+          <a:effectRef idx="1">
+            <a:schemeClr val="accent1"/>
+          </a:effectRef>
+          <a:fontRef idx="minor">
+            <a:schemeClr val="dk1"/>
+          </a:fontRef>
+        </p:style>
+        <p:txBody>
+          <a:bodyPr rtlCol="0" anchor="ctr"/>
+          <a:lstStyle/>
+          <a:p>
+            <a:pPr algn="ctr"/>
+            <a:r>
+              <a:rPr lang="ja-JP" altLang="en-US" dirty="0"/>
+              <a:t>検索</a:t>
+            </a:r>
+            <a:r>
+              <a:rPr lang="en-US" altLang="ja-JP" dirty="0"/>
+              <a:t>(</a:t>
+            </a:r>
+            <a:r>
+              <a:rPr lang="ja-JP" altLang="en-US" dirty="0"/>
+              <a:t>ヘッダ</a:t>
+            </a:r>
+            <a:r>
+              <a:rPr lang="en-US" altLang="ja-JP" dirty="0"/>
+              <a:t>)</a:t>
+            </a:r>
+            <a:endParaRPr kumimoji="1" lang="ja-JP" altLang="en-US" dirty="0"/>
+          </a:p>
+        </p:txBody>
+      </p:sp>
+      <p:cxnSp>
+        <p:nvCxnSpPr>
+          <p:cNvPr id="16" name="コネクタ: カギ線 15">
+            <a:extLst>
+              <a:ext uri="{FF2B5EF4-FFF2-40B4-BE49-F238E27FC236}">
+                <a16:creationId xmlns:a16="http://schemas.microsoft.com/office/drawing/2014/main" id="{B986DC69-D27E-D8A6-30B3-C7C58CAA681B}"/>
+              </a:ext>
+            </a:extLst>
+          </p:cNvPr>
+          <p:cNvCxnSpPr>
+            <a:cxnSpLocks/>
+            <a:stCxn id="14" idx="3"/>
+            <a:endCxn id="35" idx="3"/>
+          </p:cNvCxnSpPr>
+          <p:nvPr/>
+        </p:nvCxnSpPr>
+        <p:spPr>
+          <a:xfrm flipV="1">
+            <a:off x="3048000" y="3279247"/>
+            <a:ext cx="101810" cy="3299898"/>
+          </a:xfrm>
+          <a:prstGeom prst="bentConnector3">
+            <a:avLst>
+              <a:gd name="adj1" fmla="val 279629"/>
             </a:avLst>
           </a:prstGeom>
           <a:ln>
@@ -7310,14 +7687,13 @@
           <p:cNvCxnSpPr>
             <a:cxnSpLocks/>
             <a:stCxn id="8" idx="1"/>
-            <a:endCxn id="4" idx="3"/>
           </p:cNvCxnSpPr>
           <p:nvPr/>
         </p:nvCxnSpPr>
         <p:spPr>
           <a:xfrm rot="10800000">
-            <a:off x="4834467" y="1230632"/>
-            <a:ext cx="1322917" cy="1400438"/>
+            <a:off x="4834467" y="1353312"/>
+            <a:ext cx="1322917" cy="1277758"/>
           </a:xfrm>
           <a:prstGeom prst="bentConnector3">
             <a:avLst/>
@@ -7892,6 +8268,109 @@
           </a:p>
         </p:txBody>
       </p:sp>
+      <p:sp>
+        <p:nvSpPr>
+          <p:cNvPr id="9" name="正方形/長方形 8">
+            <a:extLst>
+              <a:ext uri="{FF2B5EF4-FFF2-40B4-BE49-F238E27FC236}">
+                <a16:creationId xmlns:a16="http://schemas.microsoft.com/office/drawing/2014/main" id="{AF5F7FE4-3C26-B0E6-074B-4BFFD3515E47}"/>
+              </a:ext>
+            </a:extLst>
+          </p:cNvPr>
+          <p:cNvSpPr/>
+          <p:nvPr/>
+        </p:nvSpPr>
+        <p:spPr>
+          <a:xfrm>
+            <a:off x="9569450" y="1407943"/>
+            <a:ext cx="2622550" cy="552068"/>
+          </a:xfrm>
+          <a:prstGeom prst="rect">
+            <a:avLst/>
+          </a:prstGeom>
+        </p:spPr>
+        <p:style>
+          <a:lnRef idx="1">
+            <a:schemeClr val="accent1"/>
+          </a:lnRef>
+          <a:fillRef idx="2">
+            <a:schemeClr val="accent1"/>
+          </a:fillRef>
+          <a:effectRef idx="1">
+            <a:schemeClr val="accent1"/>
+          </a:effectRef>
+          <a:fontRef idx="minor">
+            <a:schemeClr val="dk1"/>
+          </a:fontRef>
+        </p:style>
+        <p:txBody>
+          <a:bodyPr rtlCol="0" anchor="ctr"/>
+          <a:lstStyle/>
+          <a:p>
+            <a:pPr algn="ctr"/>
+            <a:r>
+              <a:rPr lang="ja-JP" altLang="en-US" dirty="0"/>
+              <a:t>検索</a:t>
+            </a:r>
+            <a:r>
+              <a:rPr lang="en-US" altLang="ja-JP" dirty="0"/>
+              <a:t>(</a:t>
+            </a:r>
+            <a:r>
+              <a:rPr lang="ja-JP" altLang="en-US" dirty="0"/>
+              <a:t>ヘッダ</a:t>
+            </a:r>
+            <a:r>
+              <a:rPr lang="en-US" altLang="ja-JP" dirty="0"/>
+              <a:t>)</a:t>
+            </a:r>
+            <a:endParaRPr kumimoji="1" lang="ja-JP" altLang="en-US" dirty="0"/>
+          </a:p>
+        </p:txBody>
+      </p:sp>
+      <p:cxnSp>
+        <p:nvCxnSpPr>
+          <p:cNvPr id="12" name="コネクタ: カギ線 11">
+            <a:extLst>
+              <a:ext uri="{FF2B5EF4-FFF2-40B4-BE49-F238E27FC236}">
+                <a16:creationId xmlns:a16="http://schemas.microsoft.com/office/drawing/2014/main" id="{5CF90936-CCF6-41FE-099F-023062FAB034}"/>
+              </a:ext>
+            </a:extLst>
+          </p:cNvPr>
+          <p:cNvCxnSpPr>
+            <a:cxnSpLocks/>
+            <a:stCxn id="9" idx="0"/>
+            <a:endCxn id="7" idx="3"/>
+          </p:cNvCxnSpPr>
+          <p:nvPr/>
+        </p:nvCxnSpPr>
+        <p:spPr>
+          <a:xfrm rot="16200000" flipV="1">
+            <a:off x="9805174" y="332392"/>
+            <a:ext cx="177311" cy="1973792"/>
+          </a:xfrm>
+          <a:prstGeom prst="bentConnector2">
+            <a:avLst/>
+          </a:prstGeom>
+          <a:ln>
+            <a:tailEnd type="triangle"/>
+          </a:ln>
+        </p:spPr>
+        <p:style>
+          <a:lnRef idx="2">
+            <a:schemeClr val="accent1"/>
+          </a:lnRef>
+          <a:fillRef idx="0">
+            <a:schemeClr val="accent1"/>
+          </a:fillRef>
+          <a:effectRef idx="1">
+            <a:schemeClr val="accent1"/>
+          </a:effectRef>
+          <a:fontRef idx="minor">
+            <a:schemeClr val="tx1"/>
+          </a:fontRef>
+        </p:style>
+      </p:cxnSp>
     </p:spTree>
     <p:extLst>
       <p:ext uri="{BB962C8B-B14F-4D97-AF65-F5344CB8AC3E}">
